--- a/packages/presentation/qa/jacaranda-template.pptx
+++ b/packages/presentation/qa/jacaranda-template.pptx
@@ -4486,7 +4486,7 @@
       </p:sp>
       <p:pic>
         <p:nvPicPr>
-          <p:cNvPr id="4" name="Picture 3" descr="tmps6dq_tqa.png"/>
+          <p:cNvPr id="4" name="Picture 3" descr="tmp4il21kyb.png"/>
           <p:cNvPicPr>
             <a:picLocks noChangeAspect="1"/>
           </p:cNvPicPr>
@@ -4718,7 +4718,7 @@
       </p:sp>
       <p:pic>
         <p:nvPicPr>
-          <p:cNvPr id="4" name="Picture 3" descr="tmphzfi4c2q.png"/>
+          <p:cNvPr id="4" name="Picture 3" descr="tmp2okzi3ao.png"/>
           <p:cNvPicPr>
             <a:picLocks noChangeAspect="1"/>
           </p:cNvPicPr>
@@ -5588,7 +5588,7 @@
       </p:sp>
       <p:pic>
         <p:nvPicPr>
-          <p:cNvPr id="4" name="Picture 3" descr="tmphzfi4c2q.png"/>
+          <p:cNvPr id="4" name="Picture 3" descr="tmp2okzi3ao.png"/>
           <p:cNvPicPr>
             <a:picLocks noChangeAspect="1"/>
           </p:cNvPicPr>
@@ -5891,7 +5891,7 @@
       </p:sp>
       <p:pic>
         <p:nvPicPr>
-          <p:cNvPr id="4" name="Picture 3" descr="tmphzfi4c2q.png"/>
+          <p:cNvPr id="4" name="Picture 3" descr="tmp2okzi3ao.png"/>
           <p:cNvPicPr>
             <a:picLocks noChangeAspect="1"/>
           </p:cNvPicPr>
@@ -6194,7 +6194,7 @@
       </p:sp>
       <p:pic>
         <p:nvPicPr>
-          <p:cNvPr id="4" name="Picture 3" descr="tmphzfi4c2q.png"/>
+          <p:cNvPr id="4" name="Picture 3" descr="tmp2okzi3ao.png"/>
           <p:cNvPicPr>
             <a:picLocks noChangeAspect="1"/>
           </p:cNvPicPr>
@@ -6896,7 +6896,7 @@
       </p:sp>
       <p:pic>
         <p:nvPicPr>
-          <p:cNvPr id="4" name="Picture 3" descr="tmphzfi4c2q.png"/>
+          <p:cNvPr id="4" name="Picture 3" descr="tmp2okzi3ao.png"/>
           <p:cNvPicPr>
             <a:picLocks noChangeAspect="1"/>
           </p:cNvPicPr>
@@ -7250,7 +7250,7 @@
       </p:sp>
       <p:pic>
         <p:nvPicPr>
-          <p:cNvPr id="4" name="Picture 3" descr="tmphzfi4c2q.png"/>
+          <p:cNvPr id="4" name="Picture 3" descr="tmp2okzi3ao.png"/>
           <p:cNvPicPr>
             <a:picLocks noChangeAspect="1"/>
           </p:cNvPicPr>
@@ -8322,7 +8322,7 @@
       </p:sp>
       <p:pic>
         <p:nvPicPr>
-          <p:cNvPr id="4" name="Picture 3" descr="tmphzfi4c2q.png"/>
+          <p:cNvPr id="4" name="Picture 3" descr="tmp2okzi3ao.png"/>
           <p:cNvPicPr>
             <a:picLocks noChangeAspect="1"/>
           </p:cNvPicPr>
@@ -9376,7 +9376,7 @@
       </p:sp>
       <p:pic>
         <p:nvPicPr>
-          <p:cNvPr id="4" name="Picture 3" descr="tmphzfi4c2q.png"/>
+          <p:cNvPr id="4" name="Picture 3" descr="tmp2okzi3ao.png"/>
           <p:cNvPicPr>
             <a:picLocks noChangeAspect="1"/>
           </p:cNvPicPr>
@@ -9576,7 +9576,7 @@
       </p:sp>
       <p:pic>
         <p:nvPicPr>
-          <p:cNvPr id="4" name="Picture 3" descr="tmphzfi4c2q.png"/>
+          <p:cNvPr id="4" name="Picture 3" descr="tmp2okzi3ao.png"/>
           <p:cNvPicPr>
             <a:picLocks noChangeAspect="1"/>
           </p:cNvPicPr>
@@ -9879,7 +9879,7 @@
       </p:sp>
       <p:pic>
         <p:nvPicPr>
-          <p:cNvPr id="4" name="Picture 3" descr="tmphzfi4c2q.png"/>
+          <p:cNvPr id="4" name="Picture 3" descr="tmp2okzi3ao.png"/>
           <p:cNvPicPr>
             <a:picLocks noChangeAspect="1"/>
           </p:cNvPicPr>
@@ -10511,7 +10511,7 @@
       </p:sp>
       <p:pic>
         <p:nvPicPr>
-          <p:cNvPr id="4" name="Picture 3" descr="tmphzfi4c2q.png"/>
+          <p:cNvPr id="4" name="Picture 3" descr="tmp2okzi3ao.png"/>
           <p:cNvPicPr>
             <a:picLocks noChangeAspect="1"/>
           </p:cNvPicPr>
@@ -11116,7 +11116,7 @@
       </p:sp>
       <p:pic>
         <p:nvPicPr>
-          <p:cNvPr id="4" name="Picture 3" descr="tmphzfi4c2q.png"/>
+          <p:cNvPr id="4" name="Picture 3" descr="tmp2okzi3ao.png"/>
           <p:cNvPicPr>
             <a:picLocks noChangeAspect="1"/>
           </p:cNvPicPr>
@@ -11872,7 +11872,7 @@
       </p:sp>
       <p:pic>
         <p:nvPicPr>
-          <p:cNvPr id="4" name="Picture 3" descr="tmphzfi4c2q.png"/>
+          <p:cNvPr id="4" name="Picture 3" descr="tmp2okzi3ao.png"/>
           <p:cNvPicPr>
             <a:picLocks noChangeAspect="1"/>
           </p:cNvPicPr>
@@ -12353,7 +12353,7 @@
       </p:sp>
       <p:pic>
         <p:nvPicPr>
-          <p:cNvPr id="4" name="Picture 3" descr="tmphzfi4c2q.png"/>
+          <p:cNvPr id="4" name="Picture 3" descr="tmp2okzi3ao.png"/>
           <p:cNvPicPr>
             <a:picLocks noChangeAspect="1"/>
           </p:cNvPicPr>
@@ -12656,7 +12656,7 @@
       </p:sp>
       <p:pic>
         <p:nvPicPr>
-          <p:cNvPr id="4" name="Picture 3" descr="tmphzfi4c2q.png"/>
+          <p:cNvPr id="4" name="Picture 3" descr="tmp2okzi3ao.png"/>
           <p:cNvPicPr>
             <a:picLocks noChangeAspect="1"/>
           </p:cNvPicPr>
